--- a/docs/business-plan-deck.pptx
+++ b/docs/business-plan-deck.pptx
@@ -5678,7 +5678,7 @@
                 <a:ea typeface="Microsoft YaHei" pitchFamily="34" charset="-122"/>
                 <a:cs typeface="Microsoft YaHei" pitchFamily="34" charset="-120"/>
               </a:rPr>
-              <a:t>摄影套餐 + 命书：基础现金流（含 ¥1,999–3,999 年度订阅高定）</a:t>
+              <a:t>摄影套餐 + 美学纪念册：基础现金流（含 ¥1,999–3,999 年度订阅高定）</a:t>
             </a:r>
             <a:endParaRPr lang="en-US" sz="1600" dirty="0"/>
           </a:p>
@@ -8612,7 +8612,7 @@
                 <a:ea typeface="Microsoft YaHei" pitchFamily="34" charset="-122"/>
                 <a:cs typeface="Microsoft YaHei" pitchFamily="34" charset="-120"/>
               </a:rPr>
-              <a:t>项目定位：以东方美学为内核的人像写真 + 命主画像 + 命书 + 文创产品</a:t>
+              <a:t>项目定位：以东方美学为内核的人像写真 + 命主画像 + 美学纪念册 + 文创产品</a:t>
             </a:r>
             <a:endParaRPr lang="en-US" sz="1600" dirty="0"/>
           </a:p>
@@ -9303,7 +9303,7 @@
                           <a:ea typeface="Microsoft YaHei" pitchFamily="34" charset="-122"/>
                           <a:cs typeface="Microsoft YaHei" pitchFamily="34" charset="-120"/>
                         </a:rPr>
-                        <a:t>写真 + 命主画像 + 命书</a:t>
+                        <a:t>写真 + 命主画像 + 美学纪念册</a:t>
                       </a:r>
                       <a:endParaRPr lang="en-US" sz="1300" dirty="0">
                         <a:latin typeface="Microsoft YaHei" charset="0"/>
@@ -10315,7 +10315,7 @@
                 <a:ea typeface="Microsoft YaHei" pitchFamily="34" charset="-122"/>
                 <a:cs typeface="Microsoft YaHei" pitchFamily="34" charset="-120"/>
               </a:rPr>
-              <a:t>产品：东方美学写真套餐 + 命主画像 + 命书纪念册（A/B/C 档色卡捆绑）</a:t>
+              <a:t>产品：东方美学写真套餐 + 命主画像 + 美学纪念册（A/B/C 档色卡捆绑）</a:t>
             </a:r>
             <a:endParaRPr lang="en-US" sz="1600" dirty="0"/>
           </a:p>
@@ -11374,7 +11374,7 @@
                           <a:ea typeface="Microsoft YaHei" pitchFamily="34" charset="-122"/>
                           <a:cs typeface="Microsoft YaHei" pitchFamily="34" charset="-120"/>
                         </a:rPr>
-                        <a:t>命主画像数字版 · 丝巾 · 命书 · 香薰</a:t>
+                        <a:t>命主画像数字版 · 丝巾 · 美学纪念册 · 香薰</a:t>
                       </a:r>
                       <a:endParaRPr lang="en-US" sz="1300" dirty="0">
                         <a:latin typeface="Microsoft YaHei" charset="0"/>
@@ -12614,7 +12614,7 @@
                 <a:ea typeface="Microsoft YaHei" pitchFamily="34" charset="-122"/>
                 <a:cs typeface="Microsoft YaHei" pitchFamily="34" charset="-120"/>
               </a:rPr>
-              <a:t>A 传媒：服务 / 内容 / IP（摄影、自媒体、画像命书）</a:t>
+              <a:t>A 传媒：服务 / 内容 / IP（摄影、自媒体、画像与美学纪念册）</a:t>
             </a:r>
             <a:endParaRPr lang="en-US" sz="1600" dirty="0"/>
           </a:p>
